--- a/doc/Snowball_제안서_작가팀.pptx
+++ b/doc/Snowball_제안서_작가팀.pptx
@@ -5,15 +5,15 @@
     <p:sldMasterId id="2147483648" r:id="rId1"/>
   </p:sldMasterIdLst>
   <p:sldIdLst>
-    <p:sldId id="256" r:id="rId7"/>
-    <p:sldId id="257" r:id="rId8"/>
-    <p:sldId id="258" r:id="rId9"/>
-    <p:sldId id="259" r:id="rId10"/>
-    <p:sldId id="260" r:id="rId11"/>
-    <p:sldId id="261" r:id="rId12"/>
-    <p:sldId id="262" r:id="rId13"/>
+    <p:sldId id="256" r:id="rId2"/>
+    <p:sldId id="257" r:id="rId3"/>
+    <p:sldId id="258" r:id="rId4"/>
+    <p:sldId id="259" r:id="rId5"/>
+    <p:sldId id="260" r:id="rId6"/>
+    <p:sldId id="261" r:id="rId7"/>
+    <p:sldId id="262" r:id="rId8"/>
   </p:sldIdLst>
-  <p:sldSz cx="12188952" cy="6858000" type="screen4x3"/>
+  <p:sldSz cx="12188825" cy="6858000"/>
   <p:notesSz cx="6858000" cy="9144000"/>
   <p:defaultTextStyle>
     <a:defPPr>
@@ -110,6 +110,22 @@
       </a:defRPr>
     </a:lvl9pPr>
   </p:defaultTextStyle>
+  <p:extLst>
+    <p:ext uri="{EFAFB233-063F-42B5-8137-9DF3F51BA10A}">
+      <p15:sldGuideLst xmlns:p15="http://schemas.microsoft.com/office/powerpoint/2012/main">
+        <p15:guide id="1" orient="horz" pos="2160">
+          <p15:clr>
+            <a:srgbClr val="A4A3A4"/>
+          </p15:clr>
+        </p15:guide>
+        <p15:guide id="2" pos="2880">
+          <p15:clr>
+            <a:srgbClr val="A4A3A4"/>
+          </p15:clr>
+        </p15:guide>
+      </p15:sldGuideLst>
+    </p:ext>
+  </p:extLst>
 </p:presentation>
 </file>
 
@@ -151,10 +167,9 @@
           <a:lstStyle/>
           <a:p>
             <a:r>
-              <a:rPr lang="en-US" smtClean="0"/>
+              <a:rPr lang="en-US"/>
               <a:t>Click to edit Master title style</a:t>
             </a:r>
-            <a:endParaRPr lang="en-US"/>
           </a:p>
         </p:txBody>
       </p:sp>
@@ -270,10 +285,9 @@
           </a:lstStyle>
           <a:p>
             <a:r>
-              <a:rPr lang="en-US" smtClean="0"/>
+              <a:rPr lang="en-US"/>
               <a:t>Click to edit Master subtitle style</a:t>
             </a:r>
-            <a:endParaRPr lang="en-US"/>
           </a:p>
         </p:txBody>
       </p:sp>
@@ -294,7 +308,7 @@
           <a:p>
             <a:fld id="{5BCAD085-E8A6-8845-BD4E-CB4CCA059FC4}" type="datetimeFigureOut">
               <a:rPr lang="en-US" smtClean="0"/>
-              <a:t>1/27/13</a:t>
+              <a:t>3/30/2026</a:t>
             </a:fld>
             <a:endParaRPr lang="en-US"/>
           </a:p>
@@ -388,10 +402,9 @@
           <a:lstStyle/>
           <a:p>
             <a:r>
-              <a:rPr lang="en-US" smtClean="0"/>
+              <a:rPr lang="en-US"/>
               <a:t>Click to edit Master title style</a:t>
             </a:r>
-            <a:endParaRPr lang="en-US"/>
           </a:p>
         </p:txBody>
       </p:sp>
@@ -412,38 +425,37 @@
           <a:p>
             <a:pPr lvl="0"/>
             <a:r>
-              <a:rPr lang="en-US" smtClean="0"/>
+              <a:rPr lang="en-US"/>
               <a:t>Click to edit Master text styles</a:t>
             </a:r>
           </a:p>
           <a:p>
             <a:pPr lvl="1"/>
             <a:r>
-              <a:rPr lang="en-US" smtClean="0"/>
+              <a:rPr lang="en-US"/>
               <a:t>Second level</a:t>
             </a:r>
           </a:p>
           <a:p>
             <a:pPr lvl="2"/>
             <a:r>
-              <a:rPr lang="en-US" smtClean="0"/>
+              <a:rPr lang="en-US"/>
               <a:t>Third level</a:t>
             </a:r>
           </a:p>
           <a:p>
             <a:pPr lvl="3"/>
             <a:r>
-              <a:rPr lang="en-US" smtClean="0"/>
+              <a:rPr lang="en-US"/>
               <a:t>Fourth level</a:t>
             </a:r>
           </a:p>
           <a:p>
             <a:pPr lvl="4"/>
             <a:r>
-              <a:rPr lang="en-US" smtClean="0"/>
+              <a:rPr lang="en-US"/>
               <a:t>Fifth level</a:t>
             </a:r>
-            <a:endParaRPr lang="en-US"/>
           </a:p>
         </p:txBody>
       </p:sp>
@@ -464,7 +476,7 @@
           <a:p>
             <a:fld id="{5BCAD085-E8A6-8845-BD4E-CB4CCA059FC4}" type="datetimeFigureOut">
               <a:rPr lang="en-US" smtClean="0"/>
-              <a:t>1/27/13</a:t>
+              <a:t>3/30/2026</a:t>
             </a:fld>
             <a:endParaRPr lang="en-US"/>
           </a:p>
@@ -563,10 +575,9 @@
           <a:lstStyle/>
           <a:p>
             <a:r>
-              <a:rPr lang="en-US" smtClean="0"/>
+              <a:rPr lang="en-US"/>
               <a:t>Click to edit Master title style</a:t>
             </a:r>
-            <a:endParaRPr lang="en-US"/>
           </a:p>
         </p:txBody>
       </p:sp>
@@ -592,38 +603,37 @@
           <a:p>
             <a:pPr lvl="0"/>
             <a:r>
-              <a:rPr lang="en-US" smtClean="0"/>
+              <a:rPr lang="en-US"/>
               <a:t>Click to edit Master text styles</a:t>
             </a:r>
           </a:p>
           <a:p>
             <a:pPr lvl="1"/>
             <a:r>
-              <a:rPr lang="en-US" smtClean="0"/>
+              <a:rPr lang="en-US"/>
               <a:t>Second level</a:t>
             </a:r>
           </a:p>
           <a:p>
             <a:pPr lvl="2"/>
             <a:r>
-              <a:rPr lang="en-US" smtClean="0"/>
+              <a:rPr lang="en-US"/>
               <a:t>Third level</a:t>
             </a:r>
           </a:p>
           <a:p>
             <a:pPr lvl="3"/>
             <a:r>
-              <a:rPr lang="en-US" smtClean="0"/>
+              <a:rPr lang="en-US"/>
               <a:t>Fourth level</a:t>
             </a:r>
           </a:p>
           <a:p>
             <a:pPr lvl="4"/>
             <a:r>
-              <a:rPr lang="en-US" smtClean="0"/>
+              <a:rPr lang="en-US"/>
               <a:t>Fifth level</a:t>
             </a:r>
-            <a:endParaRPr lang="en-US"/>
           </a:p>
         </p:txBody>
       </p:sp>
@@ -644,7 +654,7 @@
           <a:p>
             <a:fld id="{5BCAD085-E8A6-8845-BD4E-CB4CCA059FC4}" type="datetimeFigureOut">
               <a:rPr lang="en-US" smtClean="0"/>
-              <a:t>1/27/13</a:t>
+              <a:t>3/30/2026</a:t>
             </a:fld>
             <a:endParaRPr lang="en-US"/>
           </a:p>
@@ -738,10 +748,9 @@
           <a:lstStyle/>
           <a:p>
             <a:r>
-              <a:rPr lang="en-US" smtClean="0"/>
+              <a:rPr lang="en-US"/>
               <a:t>Click to edit Master title style</a:t>
             </a:r>
-            <a:endParaRPr lang="en-US"/>
           </a:p>
         </p:txBody>
       </p:sp>
@@ -762,38 +771,37 @@
           <a:p>
             <a:pPr lvl="0"/>
             <a:r>
-              <a:rPr lang="en-US" smtClean="0"/>
+              <a:rPr lang="en-US"/>
               <a:t>Click to edit Master text styles</a:t>
             </a:r>
           </a:p>
           <a:p>
             <a:pPr lvl="1"/>
             <a:r>
-              <a:rPr lang="en-US" smtClean="0"/>
+              <a:rPr lang="en-US"/>
               <a:t>Second level</a:t>
             </a:r>
           </a:p>
           <a:p>
             <a:pPr lvl="2"/>
             <a:r>
-              <a:rPr lang="en-US" smtClean="0"/>
+              <a:rPr lang="en-US"/>
               <a:t>Third level</a:t>
             </a:r>
           </a:p>
           <a:p>
             <a:pPr lvl="3"/>
             <a:r>
-              <a:rPr lang="en-US" smtClean="0"/>
+              <a:rPr lang="en-US"/>
               <a:t>Fourth level</a:t>
             </a:r>
           </a:p>
           <a:p>
             <a:pPr lvl="4"/>
             <a:r>
-              <a:rPr lang="en-US" smtClean="0"/>
+              <a:rPr lang="en-US"/>
               <a:t>Fifth level</a:t>
             </a:r>
-            <a:endParaRPr lang="en-US"/>
           </a:p>
         </p:txBody>
       </p:sp>
@@ -814,7 +822,7 @@
           <a:p>
             <a:fld id="{5BCAD085-E8A6-8845-BD4E-CB4CCA059FC4}" type="datetimeFigureOut">
               <a:rPr lang="en-US" smtClean="0"/>
-              <a:t>1/27/13</a:t>
+              <a:t>3/30/2026</a:t>
             </a:fld>
             <a:endParaRPr lang="en-US"/>
           </a:p>
@@ -917,10 +925,9 @@
           </a:lstStyle>
           <a:p>
             <a:r>
-              <a:rPr lang="en-US" smtClean="0"/>
+              <a:rPr lang="en-US"/>
               <a:t>Click to edit Master title style</a:t>
             </a:r>
-            <a:endParaRPr lang="en-US"/>
           </a:p>
         </p:txBody>
       </p:sp>
@@ -1037,7 +1044,7 @@
           <a:p>
             <a:pPr lvl="0"/>
             <a:r>
-              <a:rPr lang="en-US" smtClean="0"/>
+              <a:rPr lang="en-US"/>
               <a:t>Click to edit Master text styles</a:t>
             </a:r>
           </a:p>
@@ -1060,7 +1067,7 @@
           <a:p>
             <a:fld id="{5BCAD085-E8A6-8845-BD4E-CB4CCA059FC4}" type="datetimeFigureOut">
               <a:rPr lang="en-US" smtClean="0"/>
-              <a:t>1/27/13</a:t>
+              <a:t>3/30/2026</a:t>
             </a:fld>
             <a:endParaRPr lang="en-US"/>
           </a:p>
@@ -1154,10 +1161,9 @@
           <a:lstStyle/>
           <a:p>
             <a:r>
-              <a:rPr lang="en-US" smtClean="0"/>
+              <a:rPr lang="en-US"/>
               <a:t>Click to edit Master title style</a:t>
             </a:r>
-            <a:endParaRPr lang="en-US"/>
           </a:p>
         </p:txBody>
       </p:sp>
@@ -1211,38 +1217,37 @@
           <a:p>
             <a:pPr lvl="0"/>
             <a:r>
-              <a:rPr lang="en-US" smtClean="0"/>
+              <a:rPr lang="en-US"/>
               <a:t>Click to edit Master text styles</a:t>
             </a:r>
           </a:p>
           <a:p>
             <a:pPr lvl="1"/>
             <a:r>
-              <a:rPr lang="en-US" smtClean="0"/>
+              <a:rPr lang="en-US"/>
               <a:t>Second level</a:t>
             </a:r>
           </a:p>
           <a:p>
             <a:pPr lvl="2"/>
             <a:r>
-              <a:rPr lang="en-US" smtClean="0"/>
+              <a:rPr lang="en-US"/>
               <a:t>Third level</a:t>
             </a:r>
           </a:p>
           <a:p>
             <a:pPr lvl="3"/>
             <a:r>
-              <a:rPr lang="en-US" smtClean="0"/>
+              <a:rPr lang="en-US"/>
               <a:t>Fourth level</a:t>
             </a:r>
           </a:p>
           <a:p>
             <a:pPr lvl="4"/>
             <a:r>
-              <a:rPr lang="en-US" smtClean="0"/>
+              <a:rPr lang="en-US"/>
               <a:t>Fifth level</a:t>
             </a:r>
-            <a:endParaRPr lang="en-US"/>
           </a:p>
         </p:txBody>
       </p:sp>
@@ -1296,38 +1301,37 @@
           <a:p>
             <a:pPr lvl="0"/>
             <a:r>
-              <a:rPr lang="en-US" smtClean="0"/>
+              <a:rPr lang="en-US"/>
               <a:t>Click to edit Master text styles</a:t>
             </a:r>
           </a:p>
           <a:p>
             <a:pPr lvl="1"/>
             <a:r>
-              <a:rPr lang="en-US" smtClean="0"/>
+              <a:rPr lang="en-US"/>
               <a:t>Second level</a:t>
             </a:r>
           </a:p>
           <a:p>
             <a:pPr lvl="2"/>
             <a:r>
-              <a:rPr lang="en-US" smtClean="0"/>
+              <a:rPr lang="en-US"/>
               <a:t>Third level</a:t>
             </a:r>
           </a:p>
           <a:p>
             <a:pPr lvl="3"/>
             <a:r>
-              <a:rPr lang="en-US" smtClean="0"/>
+              <a:rPr lang="en-US"/>
               <a:t>Fourth level</a:t>
             </a:r>
           </a:p>
           <a:p>
             <a:pPr lvl="4"/>
             <a:r>
-              <a:rPr lang="en-US" smtClean="0"/>
+              <a:rPr lang="en-US"/>
               <a:t>Fifth level</a:t>
             </a:r>
-            <a:endParaRPr lang="en-US"/>
           </a:p>
         </p:txBody>
       </p:sp>
@@ -1348,7 +1352,7 @@
           <a:p>
             <a:fld id="{5BCAD085-E8A6-8845-BD4E-CB4CCA059FC4}" type="datetimeFigureOut">
               <a:rPr lang="en-US" smtClean="0"/>
-              <a:t>1/27/13</a:t>
+              <a:t>3/30/2026</a:t>
             </a:fld>
             <a:endParaRPr lang="en-US"/>
           </a:p>
@@ -1446,10 +1450,9 @@
           </a:lstStyle>
           <a:p>
             <a:r>
-              <a:rPr lang="en-US" smtClean="0"/>
+              <a:rPr lang="en-US"/>
               <a:t>Click to edit Master title style</a:t>
             </a:r>
-            <a:endParaRPr lang="en-US"/>
           </a:p>
         </p:txBody>
       </p:sp>
@@ -1512,7 +1515,7 @@
           <a:p>
             <a:pPr lvl="0"/>
             <a:r>
-              <a:rPr lang="en-US" smtClean="0"/>
+              <a:rPr lang="en-US"/>
               <a:t>Click to edit Master text styles</a:t>
             </a:r>
           </a:p>
@@ -1568,38 +1571,37 @@
           <a:p>
             <a:pPr lvl="0"/>
             <a:r>
-              <a:rPr lang="en-US" smtClean="0"/>
+              <a:rPr lang="en-US"/>
               <a:t>Click to edit Master text styles</a:t>
             </a:r>
           </a:p>
           <a:p>
             <a:pPr lvl="1"/>
             <a:r>
-              <a:rPr lang="en-US" smtClean="0"/>
+              <a:rPr lang="en-US"/>
               <a:t>Second level</a:t>
             </a:r>
           </a:p>
           <a:p>
             <a:pPr lvl="2"/>
             <a:r>
-              <a:rPr lang="en-US" smtClean="0"/>
+              <a:rPr lang="en-US"/>
               <a:t>Third level</a:t>
             </a:r>
           </a:p>
           <a:p>
             <a:pPr lvl="3"/>
             <a:r>
-              <a:rPr lang="en-US" smtClean="0"/>
+              <a:rPr lang="en-US"/>
               <a:t>Fourth level</a:t>
             </a:r>
           </a:p>
           <a:p>
             <a:pPr lvl="4"/>
             <a:r>
-              <a:rPr lang="en-US" smtClean="0"/>
+              <a:rPr lang="en-US"/>
               <a:t>Fifth level</a:t>
             </a:r>
-            <a:endParaRPr lang="en-US"/>
           </a:p>
         </p:txBody>
       </p:sp>
@@ -1662,7 +1664,7 @@
           <a:p>
             <a:pPr lvl="0"/>
             <a:r>
-              <a:rPr lang="en-US" smtClean="0"/>
+              <a:rPr lang="en-US"/>
               <a:t>Click to edit Master text styles</a:t>
             </a:r>
           </a:p>
@@ -1718,38 +1720,37 @@
           <a:p>
             <a:pPr lvl="0"/>
             <a:r>
-              <a:rPr lang="en-US" smtClean="0"/>
+              <a:rPr lang="en-US"/>
               <a:t>Click to edit Master text styles</a:t>
             </a:r>
           </a:p>
           <a:p>
             <a:pPr lvl="1"/>
             <a:r>
-              <a:rPr lang="en-US" smtClean="0"/>
+              <a:rPr lang="en-US"/>
               <a:t>Second level</a:t>
             </a:r>
           </a:p>
           <a:p>
             <a:pPr lvl="2"/>
             <a:r>
-              <a:rPr lang="en-US" smtClean="0"/>
+              <a:rPr lang="en-US"/>
               <a:t>Third level</a:t>
             </a:r>
           </a:p>
           <a:p>
             <a:pPr lvl="3"/>
             <a:r>
-              <a:rPr lang="en-US" smtClean="0"/>
+              <a:rPr lang="en-US"/>
               <a:t>Fourth level</a:t>
             </a:r>
           </a:p>
           <a:p>
             <a:pPr lvl="4"/>
             <a:r>
-              <a:rPr lang="en-US" smtClean="0"/>
+              <a:rPr lang="en-US"/>
               <a:t>Fifth level</a:t>
             </a:r>
-            <a:endParaRPr lang="en-US"/>
           </a:p>
         </p:txBody>
       </p:sp>
@@ -1770,7 +1771,7 @@
           <a:p>
             <a:fld id="{5BCAD085-E8A6-8845-BD4E-CB4CCA059FC4}" type="datetimeFigureOut">
               <a:rPr lang="en-US" smtClean="0"/>
-              <a:t>1/27/13</a:t>
+              <a:t>3/30/2026</a:t>
             </a:fld>
             <a:endParaRPr lang="en-US"/>
           </a:p>
@@ -1864,10 +1865,9 @@
           <a:lstStyle/>
           <a:p>
             <a:r>
-              <a:rPr lang="en-US" smtClean="0"/>
+              <a:rPr lang="en-US"/>
               <a:t>Click to edit Master title style</a:t>
             </a:r>
-            <a:endParaRPr lang="en-US"/>
           </a:p>
         </p:txBody>
       </p:sp>
@@ -1888,7 +1888,7 @@
           <a:p>
             <a:fld id="{5BCAD085-E8A6-8845-BD4E-CB4CCA059FC4}" type="datetimeFigureOut">
               <a:rPr lang="en-US" smtClean="0"/>
-              <a:t>1/27/13</a:t>
+              <a:t>3/30/2026</a:t>
             </a:fld>
             <a:endParaRPr lang="en-US"/>
           </a:p>
@@ -1983,7 +1983,7 @@
           <a:p>
             <a:fld id="{5BCAD085-E8A6-8845-BD4E-CB4CCA059FC4}" type="datetimeFigureOut">
               <a:rPr lang="en-US" smtClean="0"/>
-              <a:t>1/27/13</a:t>
+              <a:t>3/30/2026</a:t>
             </a:fld>
             <a:endParaRPr lang="en-US"/>
           </a:p>
@@ -2086,10 +2086,9 @@
           </a:lstStyle>
           <a:p>
             <a:r>
-              <a:rPr lang="en-US" smtClean="0"/>
+              <a:rPr lang="en-US"/>
               <a:t>Click to edit Master title style</a:t>
             </a:r>
-            <a:endParaRPr lang="en-US"/>
           </a:p>
         </p:txBody>
       </p:sp>
@@ -2143,38 +2142,37 @@
           <a:p>
             <a:pPr lvl="0"/>
             <a:r>
-              <a:rPr lang="en-US" smtClean="0"/>
+              <a:rPr lang="en-US"/>
               <a:t>Click to edit Master text styles</a:t>
             </a:r>
           </a:p>
           <a:p>
             <a:pPr lvl="1"/>
             <a:r>
-              <a:rPr lang="en-US" smtClean="0"/>
+              <a:rPr lang="en-US"/>
               <a:t>Second level</a:t>
             </a:r>
           </a:p>
           <a:p>
             <a:pPr lvl="2"/>
             <a:r>
-              <a:rPr lang="en-US" smtClean="0"/>
+              <a:rPr lang="en-US"/>
               <a:t>Third level</a:t>
             </a:r>
           </a:p>
           <a:p>
             <a:pPr lvl="3"/>
             <a:r>
-              <a:rPr lang="en-US" smtClean="0"/>
+              <a:rPr lang="en-US"/>
               <a:t>Fourth level</a:t>
             </a:r>
           </a:p>
           <a:p>
             <a:pPr lvl="4"/>
             <a:r>
-              <a:rPr lang="en-US" smtClean="0"/>
+              <a:rPr lang="en-US"/>
               <a:t>Fifth level</a:t>
             </a:r>
-            <a:endParaRPr lang="en-US"/>
           </a:p>
         </p:txBody>
       </p:sp>
@@ -2237,7 +2235,7 @@
           <a:p>
             <a:pPr lvl="0"/>
             <a:r>
-              <a:rPr lang="en-US" smtClean="0"/>
+              <a:rPr lang="en-US"/>
               <a:t>Click to edit Master text styles</a:t>
             </a:r>
           </a:p>
@@ -2260,7 +2258,7 @@
           <a:p>
             <a:fld id="{5BCAD085-E8A6-8845-BD4E-CB4CCA059FC4}" type="datetimeFigureOut">
               <a:rPr lang="en-US" smtClean="0"/>
-              <a:t>1/27/13</a:t>
+              <a:t>3/30/2026</a:t>
             </a:fld>
             <a:endParaRPr lang="en-US"/>
           </a:p>
@@ -2363,10 +2361,9 @@
           </a:lstStyle>
           <a:p>
             <a:r>
-              <a:rPr lang="en-US" smtClean="0"/>
+              <a:rPr lang="en-US"/>
               <a:t>Click to edit Master title style</a:t>
             </a:r>
-            <a:endParaRPr lang="en-US"/>
           </a:p>
         </p:txBody>
       </p:sp>
@@ -2490,7 +2487,7 @@
           <a:p>
             <a:pPr lvl="0"/>
             <a:r>
-              <a:rPr lang="en-US" smtClean="0"/>
+              <a:rPr lang="en-US"/>
               <a:t>Click to edit Master text styles</a:t>
             </a:r>
           </a:p>
@@ -2513,7 +2510,7 @@
           <a:p>
             <a:fld id="{5BCAD085-E8A6-8845-BD4E-CB4CCA059FC4}" type="datetimeFigureOut">
               <a:rPr lang="en-US" smtClean="0"/>
-              <a:t>1/27/13</a:t>
+              <a:t>3/30/2026</a:t>
             </a:fld>
             <a:endParaRPr lang="en-US"/>
           </a:p>
@@ -2622,10 +2619,9 @@
           <a:lstStyle/>
           <a:p>
             <a:r>
-              <a:rPr lang="en-US" smtClean="0"/>
+              <a:rPr lang="en-US"/>
               <a:t>Click to edit Master title style</a:t>
             </a:r>
-            <a:endParaRPr lang="en-US"/>
           </a:p>
         </p:txBody>
       </p:sp>
@@ -2656,38 +2652,37 @@
           <a:p>
             <a:pPr lvl="0"/>
             <a:r>
-              <a:rPr lang="en-US" smtClean="0"/>
+              <a:rPr lang="en-US"/>
               <a:t>Click to edit Master text styles</a:t>
             </a:r>
           </a:p>
           <a:p>
             <a:pPr lvl="1"/>
             <a:r>
-              <a:rPr lang="en-US" smtClean="0"/>
+              <a:rPr lang="en-US"/>
               <a:t>Second level</a:t>
             </a:r>
           </a:p>
           <a:p>
             <a:pPr lvl="2"/>
             <a:r>
-              <a:rPr lang="en-US" smtClean="0"/>
+              <a:rPr lang="en-US"/>
               <a:t>Third level</a:t>
             </a:r>
           </a:p>
           <a:p>
             <a:pPr lvl="3"/>
             <a:r>
-              <a:rPr lang="en-US" smtClean="0"/>
+              <a:rPr lang="en-US"/>
               <a:t>Fourth level</a:t>
             </a:r>
           </a:p>
           <a:p>
             <a:pPr lvl="4"/>
             <a:r>
-              <a:rPr lang="en-US" smtClean="0"/>
+              <a:rPr lang="en-US"/>
               <a:t>Fifth level</a:t>
             </a:r>
-            <a:endParaRPr lang="en-US"/>
           </a:p>
         </p:txBody>
       </p:sp>
@@ -2726,7 +2721,7 @@
           <a:p>
             <a:fld id="{5BCAD085-E8A6-8845-BD4E-CB4CCA059FC4}" type="datetimeFigureOut">
               <a:rPr lang="en-US" smtClean="0"/>
-              <a:t>1/27/13</a:t>
+              <a:t>3/30/2026</a:t>
             </a:fld>
             <a:endParaRPr lang="en-US"/>
           </a:p>
@@ -3085,7 +3080,7 @@
 </file>
 
 <file path=ppt/slides/slide1.xml><?xml version="1.0" encoding="utf-8"?>
-<p:sld xmlns:a="http://schemas.openxmlformats.org/drawingml/2006/main" xmlns:p="http://schemas.openxmlformats.org/presentationml/2006/main" xmlns:r="http://schemas.openxmlformats.org/officeDocument/2006/relationships">
+<p:sld xmlns:a="http://schemas.openxmlformats.org/drawingml/2006/main" xmlns:r="http://schemas.openxmlformats.org/officeDocument/2006/relationships" xmlns:p="http://schemas.openxmlformats.org/presentationml/2006/main">
   <p:cSld>
     <p:bg>
       <p:bgPr>
@@ -3101,7 +3096,14 @@
         <p:cNvGrpSpPr/>
         <p:nvPr/>
       </p:nvGrpSpPr>
-      <p:grpSpPr/>
+      <p:grpSpPr>
+        <a:xfrm>
+          <a:off x="0" y="0"/>
+          <a:ext cx="0" cy="0"/>
+          <a:chOff x="0" y="0"/>
+          <a:chExt cx="0" cy="0"/>
+        </a:xfrm>
+      </p:grpSpPr>
       <p:sp>
         <p:nvSpPr>
           <p:cNvPr id="2" name="Oval 1"/>
@@ -3142,6 +3144,7 @@
           <a:lstStyle/>
           <a:p>
             <a:pPr algn="ctr"/>
+            <a:endParaRPr/>
           </a:p>
         </p:txBody>
       </p:sp>
@@ -3185,6 +3188,7 @@
           <a:lstStyle/>
           <a:p>
             <a:pPr algn="ctr"/>
+            <a:endParaRPr/>
           </a:p>
         </p:txBody>
       </p:sp>
@@ -3228,6 +3232,7 @@
           <a:lstStyle/>
           <a:p>
             <a:pPr algn="ctr"/>
+            <a:endParaRPr/>
           </a:p>
         </p:txBody>
       </p:sp>
@@ -3408,6 +3413,7 @@
           <a:lstStyle/>
           <a:p>
             <a:pPr algn="ctr"/>
+            <a:endParaRPr/>
           </a:p>
         </p:txBody>
       </p:sp>
@@ -3519,6 +3525,7 @@
           <a:lstStyle/>
           <a:p>
             <a:pPr algn="ctr"/>
+            <a:endParaRPr/>
           </a:p>
         </p:txBody>
       </p:sp>
@@ -3630,6 +3637,7 @@
           <a:lstStyle/>
           <a:p>
             <a:pPr algn="ctr"/>
+            <a:endParaRPr/>
           </a:p>
         </p:txBody>
       </p:sp>
@@ -3744,7 +3752,7 @@
 </file>
 
 <file path=ppt/slides/slide2.xml><?xml version="1.0" encoding="utf-8"?>
-<p:sld xmlns:a="http://schemas.openxmlformats.org/drawingml/2006/main" xmlns:p="http://schemas.openxmlformats.org/presentationml/2006/main" xmlns:r="http://schemas.openxmlformats.org/officeDocument/2006/relationships">
+<p:sld xmlns:a="http://schemas.openxmlformats.org/drawingml/2006/main" xmlns:r="http://schemas.openxmlformats.org/officeDocument/2006/relationships" xmlns:p="http://schemas.openxmlformats.org/presentationml/2006/main">
   <p:cSld>
     <p:bg>
       <p:bgPr>
@@ -3760,7 +3768,14 @@
         <p:cNvGrpSpPr/>
         <p:nvPr/>
       </p:nvGrpSpPr>
-      <p:grpSpPr/>
+      <p:grpSpPr>
+        <a:xfrm>
+          <a:off x="0" y="0"/>
+          <a:ext cx="0" cy="0"/>
+          <a:chOff x="0" y="0"/>
+          <a:chExt cx="0" cy="0"/>
+        </a:xfrm>
+      </p:grpSpPr>
       <p:sp>
         <p:nvSpPr>
           <p:cNvPr id="2" name="Rectangle 1"/>
@@ -3801,6 +3816,7 @@
           <a:lstStyle/>
           <a:p>
             <a:pPr algn="ctr"/>
+            <a:endParaRPr/>
           </a:p>
         </p:txBody>
       </p:sp>
@@ -3912,6 +3928,7 @@
           <a:lstStyle/>
           <a:p>
             <a:pPr algn="ctr"/>
+            <a:endParaRPr/>
           </a:p>
         </p:txBody>
       </p:sp>
@@ -3955,6 +3972,7 @@
           <a:lstStyle/>
           <a:p>
             <a:pPr algn="ctr"/>
+            <a:endParaRPr/>
           </a:p>
         </p:txBody>
       </p:sp>
@@ -4101,6 +4119,7 @@
           <a:lstStyle/>
           <a:p>
             <a:pPr algn="ctr"/>
+            <a:endParaRPr/>
           </a:p>
         </p:txBody>
       </p:sp>
@@ -4144,6 +4163,7 @@
           <a:lstStyle/>
           <a:p>
             <a:pPr algn="ctr"/>
+            <a:endParaRPr/>
           </a:p>
         </p:txBody>
       </p:sp>
@@ -4290,6 +4310,7 @@
           <a:lstStyle/>
           <a:p>
             <a:pPr algn="ctr"/>
+            <a:endParaRPr/>
           </a:p>
         </p:txBody>
       </p:sp>
@@ -4333,6 +4354,7 @@
           <a:lstStyle/>
           <a:p>
             <a:pPr algn="ctr"/>
+            <a:endParaRPr/>
           </a:p>
         </p:txBody>
       </p:sp>
@@ -4448,7 +4470,7 @@
 </file>
 
 <file path=ppt/slides/slide3.xml><?xml version="1.0" encoding="utf-8"?>
-<p:sld xmlns:a="http://schemas.openxmlformats.org/drawingml/2006/main" xmlns:p="http://schemas.openxmlformats.org/presentationml/2006/main" xmlns:r="http://schemas.openxmlformats.org/officeDocument/2006/relationships">
+<p:sld xmlns:a="http://schemas.openxmlformats.org/drawingml/2006/main" xmlns:r="http://schemas.openxmlformats.org/officeDocument/2006/relationships" xmlns:p="http://schemas.openxmlformats.org/presentationml/2006/main">
   <p:cSld>
     <p:bg>
       <p:bgPr>
@@ -4464,7 +4486,14 @@
         <p:cNvGrpSpPr/>
         <p:nvPr/>
       </p:nvGrpSpPr>
-      <p:grpSpPr/>
+      <p:grpSpPr>
+        <a:xfrm>
+          <a:off x="0" y="0"/>
+          <a:ext cx="0" cy="0"/>
+          <a:chOff x="0" y="0"/>
+          <a:chExt cx="0" cy="0"/>
+        </a:xfrm>
+      </p:grpSpPr>
       <p:sp>
         <p:nvSpPr>
           <p:cNvPr id="2" name="Rectangle 1"/>
@@ -4505,6 +4534,7 @@
           <a:lstStyle/>
           <a:p>
             <a:pPr algn="ctr"/>
+            <a:endParaRPr/>
           </a:p>
         </p:txBody>
       </p:sp>
@@ -4616,6 +4646,7 @@
           <a:lstStyle/>
           <a:p>
             <a:pPr algn="ctr"/>
+            <a:endParaRPr/>
           </a:p>
         </p:txBody>
       </p:sp>
@@ -4795,6 +4826,7 @@
           <a:lstStyle/>
           <a:p>
             <a:pPr algn="ctr"/>
+            <a:endParaRPr/>
           </a:p>
         </p:txBody>
       </p:sp>
@@ -4940,6 +4972,7 @@
           <a:lstStyle/>
           <a:p>
             <a:pPr algn="ctr"/>
+            <a:endParaRPr/>
           </a:p>
         </p:txBody>
       </p:sp>
@@ -4983,6 +5016,7 @@
           <a:lstStyle/>
           <a:p>
             <a:pPr algn="ctr"/>
+            <a:endParaRPr/>
           </a:p>
         </p:txBody>
       </p:sp>
@@ -5060,6 +5094,7 @@
           <a:lstStyle/>
           <a:p>
             <a:pPr algn="ctr"/>
+            <a:endParaRPr/>
           </a:p>
         </p:txBody>
       </p:sp>
@@ -5205,6 +5240,7 @@
           <a:lstStyle/>
           <a:p>
             <a:pPr algn="ctr"/>
+            <a:endParaRPr/>
           </a:p>
         </p:txBody>
       </p:sp>
@@ -5248,6 +5284,7 @@
           <a:lstStyle/>
           <a:p>
             <a:pPr algn="ctr"/>
+            <a:endParaRPr/>
           </a:p>
         </p:txBody>
       </p:sp>
@@ -5359,6 +5396,7 @@
           <a:lstStyle/>
           <a:p>
             <a:pPr algn="ctr"/>
+            <a:endParaRPr/>
           </a:p>
         </p:txBody>
       </p:sp>
@@ -5402,6 +5440,7 @@
           <a:lstStyle/>
           <a:p>
             <a:pPr algn="ctr"/>
+            <a:endParaRPr/>
           </a:p>
         </p:txBody>
       </p:sp>
@@ -5513,6 +5552,7 @@
           <a:lstStyle/>
           <a:p>
             <a:pPr algn="ctr"/>
+            <a:endParaRPr/>
           </a:p>
         </p:txBody>
       </p:sp>
@@ -5556,6 +5596,7 @@
           <a:lstStyle/>
           <a:p>
             <a:pPr algn="ctr"/>
+            <a:endParaRPr/>
           </a:p>
         </p:txBody>
       </p:sp>
@@ -5667,6 +5708,7 @@
           <a:lstStyle/>
           <a:p>
             <a:pPr algn="ctr"/>
+            <a:endParaRPr/>
           </a:p>
         </p:txBody>
       </p:sp>
@@ -5710,6 +5752,7 @@
           <a:lstStyle/>
           <a:p>
             <a:pPr algn="ctr"/>
+            <a:endParaRPr/>
           </a:p>
         </p:txBody>
       </p:sp>
@@ -5790,7 +5833,7 @@
 </file>
 
 <file path=ppt/slides/slide4.xml><?xml version="1.0" encoding="utf-8"?>
-<p:sld xmlns:a="http://schemas.openxmlformats.org/drawingml/2006/main" xmlns:p="http://schemas.openxmlformats.org/presentationml/2006/main" xmlns:r="http://schemas.openxmlformats.org/officeDocument/2006/relationships">
+<p:sld xmlns:a="http://schemas.openxmlformats.org/drawingml/2006/main" xmlns:r="http://schemas.openxmlformats.org/officeDocument/2006/relationships" xmlns:p="http://schemas.openxmlformats.org/presentationml/2006/main">
   <p:cSld>
     <p:bg>
       <p:bgPr>
@@ -5806,7 +5849,14 @@
         <p:cNvGrpSpPr/>
         <p:nvPr/>
       </p:nvGrpSpPr>
-      <p:grpSpPr/>
+      <p:grpSpPr>
+        <a:xfrm>
+          <a:off x="0" y="0"/>
+          <a:ext cx="0" cy="0"/>
+          <a:chOff x="0" y="0"/>
+          <a:chExt cx="0" cy="0"/>
+        </a:xfrm>
+      </p:grpSpPr>
       <p:sp>
         <p:nvSpPr>
           <p:cNvPr id="2" name="TextBox 1"/>
@@ -5915,6 +5965,7 @@
           <a:lstStyle/>
           <a:p>
             <a:pPr algn="ctr"/>
+            <a:endParaRPr/>
           </a:p>
         </p:txBody>
       </p:sp>
@@ -5958,6 +6009,7 @@
           <a:lstStyle/>
           <a:p>
             <a:pPr algn="ctr"/>
+            <a:endParaRPr/>
           </a:p>
         </p:txBody>
       </p:sp>
@@ -6001,6 +6053,7 @@
           <a:lstStyle/>
           <a:p>
             <a:pPr algn="ctr"/>
+            <a:endParaRPr/>
           </a:p>
         </p:txBody>
       </p:sp>
@@ -6147,6 +6200,7 @@
           <a:lstStyle/>
           <a:p>
             <a:pPr algn="ctr"/>
+            <a:endParaRPr/>
           </a:p>
         </p:txBody>
       </p:sp>
@@ -6159,7 +6213,7 @@
         <p:spPr>
           <a:xfrm>
             <a:off x="850392" y="2999232"/>
-            <a:ext cx="3063240" cy="384048"/>
+            <a:ext cx="3063240" cy="253916"/>
           </a:xfrm>
           <a:prstGeom prst="rect">
             <a:avLst/>
@@ -6174,13 +6228,66 @@
           <a:p>
             <a:pPr algn="l"/>
             <a:r>
-              <a:rPr sz="1050" b="0" i="0">
+              <a:rPr sz="1050" b="0" i="0" dirty="0" err="1">
                 <a:solidFill>
                   <a:srgbClr val="CCE4F0"/>
                 </a:solidFill>
               </a:rPr>
-              <a:t>연중 상시 밀착 지원 (월 정액)</a:t>
-            </a:r>
+              <a:t>연중</a:t>
+            </a:r>
+            <a:r>
+              <a:rPr sz="1050" b="0" i="0" dirty="0">
+                <a:solidFill>
+                  <a:srgbClr val="CCE4F0"/>
+                </a:solidFill>
+              </a:rPr>
+              <a:t> </a:t>
+            </a:r>
+            <a:r>
+              <a:rPr sz="1050" b="0" i="0" dirty="0" err="1">
+                <a:solidFill>
+                  <a:srgbClr val="CCE4F0"/>
+                </a:solidFill>
+              </a:rPr>
+              <a:t>상시</a:t>
+            </a:r>
+            <a:r>
+              <a:rPr sz="1050" b="0" i="0" dirty="0">
+                <a:solidFill>
+                  <a:srgbClr val="CCE4F0"/>
+                </a:solidFill>
+              </a:rPr>
+              <a:t> </a:t>
+            </a:r>
+            <a:r>
+              <a:rPr sz="1050" b="0" i="0" dirty="0" err="1">
+                <a:solidFill>
+                  <a:srgbClr val="CCE4F0"/>
+                </a:solidFill>
+              </a:rPr>
+              <a:t>밀착</a:t>
+            </a:r>
+            <a:r>
+              <a:rPr sz="1050" b="0" i="0" dirty="0">
+                <a:solidFill>
+                  <a:srgbClr val="CCE4F0"/>
+                </a:solidFill>
+              </a:rPr>
+              <a:t> </a:t>
+            </a:r>
+            <a:r>
+              <a:rPr sz="1050" b="0" i="0" dirty="0" err="1">
+                <a:solidFill>
+                  <a:srgbClr val="CCE4F0"/>
+                </a:solidFill>
+              </a:rPr>
+              <a:t>지원</a:t>
+            </a:r>
+            <a:endParaRPr sz="1050" b="0" i="0" dirty="0">
+              <a:solidFill>
+                <a:srgbClr val="CCE4F0"/>
+              </a:solidFill>
+            </a:endParaRPr>
           </a:p>
         </p:txBody>
       </p:sp>
@@ -6224,6 +6331,7 @@
           <a:lstStyle/>
           <a:p>
             <a:pPr algn="ctr"/>
+            <a:endParaRPr/>
           </a:p>
         </p:txBody>
       </p:sp>
@@ -6301,6 +6409,7 @@
           <a:lstStyle/>
           <a:p>
             <a:pPr algn="ctr"/>
+            <a:endParaRPr/>
           </a:p>
         </p:txBody>
       </p:sp>
@@ -6378,6 +6487,7 @@
           <a:lstStyle/>
           <a:p>
             <a:pPr algn="ctr"/>
+            <a:endParaRPr/>
           </a:p>
         </p:txBody>
       </p:sp>
@@ -6390,7 +6500,7 @@
         <p:spPr>
           <a:xfrm>
             <a:off x="850392" y="4370831"/>
-            <a:ext cx="3063240" cy="384048"/>
+            <a:ext cx="3063240" cy="253916"/>
           </a:xfrm>
           <a:prstGeom prst="rect">
             <a:avLst/>
@@ -6405,13 +6515,50 @@
           <a:p>
             <a:pPr algn="l"/>
             <a:r>
-              <a:rPr sz="1050" b="0" i="0">
+              <a:rPr lang="ko-KR" altLang="en-US" sz="1050" dirty="0">
                 <a:solidFill>
                   <a:srgbClr val="CCE4F0"/>
                 </a:solidFill>
               </a:rPr>
-              <a:t>PA 대비 1/4 비용</a:t>
-            </a:r>
+              <a:t>채용</a:t>
+            </a:r>
+            <a:r>
+              <a:rPr sz="1050" b="0" i="0" dirty="0">
+                <a:solidFill>
+                  <a:srgbClr val="CCE4F0"/>
+                </a:solidFill>
+              </a:rPr>
+              <a:t> </a:t>
+            </a:r>
+            <a:r>
+              <a:rPr sz="1050" b="0" i="0" dirty="0" err="1">
+                <a:solidFill>
+                  <a:srgbClr val="CCE4F0"/>
+                </a:solidFill>
+              </a:rPr>
+              <a:t>대비</a:t>
+            </a:r>
+            <a:r>
+              <a:rPr sz="1050" b="0" i="0" dirty="0">
+                <a:solidFill>
+                  <a:srgbClr val="CCE4F0"/>
+                </a:solidFill>
+              </a:rPr>
+              <a:t> 1/4 </a:t>
+            </a:r>
+            <a:r>
+              <a:rPr sz="1050" b="0" i="0" dirty="0" err="1">
+                <a:solidFill>
+                  <a:srgbClr val="CCE4F0"/>
+                </a:solidFill>
+              </a:rPr>
+              <a:t>비용</a:t>
+            </a:r>
+            <a:endParaRPr sz="1050" b="0" i="0" dirty="0">
+              <a:solidFill>
+                <a:srgbClr val="CCE4F0"/>
+              </a:solidFill>
+            </a:endParaRPr>
           </a:p>
         </p:txBody>
       </p:sp>
@@ -6455,6 +6602,7 @@
           <a:lstStyle/>
           <a:p>
             <a:pPr algn="ctr"/>
+            <a:endParaRPr/>
           </a:p>
         </p:txBody>
       </p:sp>
@@ -6532,6 +6680,7 @@
           <a:lstStyle/>
           <a:p>
             <a:pPr algn="ctr"/>
+            <a:endParaRPr/>
           </a:p>
         </p:txBody>
       </p:sp>
@@ -6575,6 +6724,7 @@
           <a:lstStyle/>
           <a:p>
             <a:pPr algn="ctr"/>
+            <a:endParaRPr/>
           </a:p>
         </p:txBody>
       </p:sp>
@@ -6618,6 +6768,7 @@
           <a:lstStyle/>
           <a:p>
             <a:pPr algn="ctr"/>
+            <a:endParaRPr/>
           </a:p>
         </p:txBody>
       </p:sp>
@@ -6764,6 +6915,7 @@
           <a:lstStyle/>
           <a:p>
             <a:pPr algn="ctr"/>
+            <a:endParaRPr/>
           </a:p>
         </p:txBody>
       </p:sp>
@@ -6841,6 +6993,7 @@
           <a:lstStyle/>
           <a:p>
             <a:pPr algn="ctr"/>
+            <a:endParaRPr/>
           </a:p>
         </p:txBody>
       </p:sp>
@@ -6918,6 +7071,7 @@
           <a:lstStyle/>
           <a:p>
             <a:pPr algn="ctr"/>
+            <a:endParaRPr/>
           </a:p>
         </p:txBody>
       </p:sp>
@@ -6995,6 +7149,7 @@
           <a:lstStyle/>
           <a:p>
             <a:pPr algn="ctr"/>
+            <a:endParaRPr/>
           </a:p>
         </p:txBody>
       </p:sp>
@@ -7072,6 +7227,7 @@
           <a:lstStyle/>
           <a:p>
             <a:pPr algn="ctr"/>
+            <a:endParaRPr/>
           </a:p>
         </p:txBody>
       </p:sp>
@@ -7149,6 +7305,7 @@
           <a:lstStyle/>
           <a:p>
             <a:pPr algn="ctr"/>
+            <a:endParaRPr/>
           </a:p>
         </p:txBody>
       </p:sp>
@@ -7192,6 +7349,7 @@
           <a:lstStyle/>
           <a:p>
             <a:pPr algn="ctr"/>
+            <a:endParaRPr/>
           </a:p>
         </p:txBody>
       </p:sp>
@@ -7235,6 +7393,7 @@
           <a:lstStyle/>
           <a:p>
             <a:pPr algn="ctr"/>
+            <a:endParaRPr/>
           </a:p>
         </p:txBody>
       </p:sp>
@@ -7381,6 +7540,7 @@
           <a:lstStyle/>
           <a:p>
             <a:pPr algn="ctr"/>
+            <a:endParaRPr/>
           </a:p>
         </p:txBody>
       </p:sp>
@@ -7458,6 +7618,7 @@
           <a:lstStyle/>
           <a:p>
             <a:pPr algn="ctr"/>
+            <a:endParaRPr/>
           </a:p>
         </p:txBody>
       </p:sp>
@@ -7535,6 +7696,7 @@
           <a:lstStyle/>
           <a:p>
             <a:pPr algn="ctr"/>
+            <a:endParaRPr/>
           </a:p>
         </p:txBody>
       </p:sp>
@@ -7612,6 +7774,7 @@
           <a:lstStyle/>
           <a:p>
             <a:pPr algn="ctr"/>
+            <a:endParaRPr/>
           </a:p>
         </p:txBody>
       </p:sp>
@@ -7689,6 +7852,7 @@
           <a:lstStyle/>
           <a:p>
             <a:pPr algn="ctr"/>
+            <a:endParaRPr/>
           </a:p>
         </p:txBody>
       </p:sp>
@@ -7769,7 +7933,7 @@
 </file>
 
 <file path=ppt/slides/slide5.xml><?xml version="1.0" encoding="utf-8"?>
-<p:sld xmlns:a="http://schemas.openxmlformats.org/drawingml/2006/main" xmlns:p="http://schemas.openxmlformats.org/presentationml/2006/main" xmlns:r="http://schemas.openxmlformats.org/officeDocument/2006/relationships">
+<p:sld xmlns:a="http://schemas.openxmlformats.org/drawingml/2006/main" xmlns:r="http://schemas.openxmlformats.org/officeDocument/2006/relationships" xmlns:p="http://schemas.openxmlformats.org/presentationml/2006/main">
   <p:cSld>
     <p:bg>
       <p:bgPr>
@@ -7785,7 +7949,14 @@
         <p:cNvGrpSpPr/>
         <p:nvPr/>
       </p:nvGrpSpPr>
-      <p:grpSpPr/>
+      <p:grpSpPr>
+        <a:xfrm>
+          <a:off x="0" y="0"/>
+          <a:ext cx="0" cy="0"/>
+          <a:chOff x="0" y="0"/>
+          <a:chExt cx="0" cy="0"/>
+        </a:xfrm>
+      </p:grpSpPr>
       <p:sp>
         <p:nvSpPr>
           <p:cNvPr id="2" name="Rectangle 1"/>
@@ -7826,6 +7997,7 @@
           <a:lstStyle/>
           <a:p>
             <a:pPr algn="ctr"/>
+            <a:endParaRPr/>
           </a:p>
         </p:txBody>
       </p:sp>
@@ -7961,6 +8133,7 @@
           <a:lstStyle/>
           <a:p>
             <a:pPr algn="ctr"/>
+            <a:endParaRPr/>
           </a:p>
         </p:txBody>
       </p:sp>
@@ -8096,6 +8269,7 @@
           <a:lstStyle/>
           <a:p>
             <a:pPr algn="ctr"/>
+            <a:endParaRPr/>
           </a:p>
         </p:txBody>
       </p:sp>
@@ -8231,6 +8405,7 @@
           <a:lstStyle/>
           <a:p>
             <a:pPr algn="ctr"/>
+            <a:endParaRPr/>
           </a:p>
         </p:txBody>
       </p:sp>
@@ -8366,6 +8541,7 @@
           <a:lstStyle/>
           <a:p>
             <a:pPr algn="ctr"/>
+            <a:endParaRPr/>
           </a:p>
         </p:txBody>
       </p:sp>
@@ -8446,7 +8622,7 @@
 </file>
 
 <file path=ppt/slides/slide6.xml><?xml version="1.0" encoding="utf-8"?>
-<p:sld xmlns:a="http://schemas.openxmlformats.org/drawingml/2006/main" xmlns:p="http://schemas.openxmlformats.org/presentationml/2006/main" xmlns:r="http://schemas.openxmlformats.org/officeDocument/2006/relationships">
+<p:sld xmlns:a="http://schemas.openxmlformats.org/drawingml/2006/main" xmlns:r="http://schemas.openxmlformats.org/officeDocument/2006/relationships" xmlns:p="http://schemas.openxmlformats.org/presentationml/2006/main">
   <p:cSld>
     <p:bg>
       <p:bgPr>
@@ -8462,7 +8638,14 @@
         <p:cNvGrpSpPr/>
         <p:nvPr/>
       </p:nvGrpSpPr>
-      <p:grpSpPr/>
+      <p:grpSpPr>
+        <a:xfrm>
+          <a:off x="0" y="0"/>
+          <a:ext cx="0" cy="0"/>
+          <a:chOff x="0" y="0"/>
+          <a:chExt cx="0" cy="0"/>
+        </a:xfrm>
+      </p:grpSpPr>
       <p:sp>
         <p:nvSpPr>
           <p:cNvPr id="2" name="Rectangle 1"/>
@@ -8503,6 +8686,7 @@
           <a:lstStyle/>
           <a:p>
             <a:pPr algn="ctr"/>
+            <a:endParaRPr/>
           </a:p>
         </p:txBody>
       </p:sp>
@@ -8614,6 +8798,7 @@
           <a:lstStyle/>
           <a:p>
             <a:pPr algn="ctr"/>
+            <a:endParaRPr/>
           </a:p>
         </p:txBody>
       </p:sp>
@@ -8657,6 +8842,7 @@
           <a:lstStyle/>
           <a:p>
             <a:pPr algn="ctr"/>
+            <a:endParaRPr/>
           </a:p>
         </p:txBody>
       </p:sp>
@@ -8769,6 +8955,7 @@
           <a:lstStyle/>
           <a:p>
             <a:pPr algn="ctr"/>
+            <a:endParaRPr/>
           </a:p>
         </p:txBody>
       </p:sp>
@@ -8846,6 +9033,7 @@
           <a:lstStyle/>
           <a:p>
             <a:pPr algn="ctr"/>
+            <a:endParaRPr/>
           </a:p>
         </p:txBody>
       </p:sp>
@@ -8923,6 +9111,7 @@
           <a:lstStyle/>
           <a:p>
             <a:pPr algn="ctr"/>
+            <a:endParaRPr/>
           </a:p>
         </p:txBody>
       </p:sp>
@@ -9000,6 +9189,7 @@
           <a:lstStyle/>
           <a:p>
             <a:pPr algn="ctr"/>
+            <a:endParaRPr/>
           </a:p>
         </p:txBody>
       </p:sp>
@@ -9145,6 +9335,7 @@
           <a:lstStyle/>
           <a:p>
             <a:pPr algn="ctr"/>
+            <a:endParaRPr/>
           </a:p>
         </p:txBody>
       </p:sp>
@@ -9290,6 +9481,7 @@
           <a:lstStyle/>
           <a:p>
             <a:pPr algn="ctr"/>
+            <a:endParaRPr/>
           </a:p>
         </p:txBody>
       </p:sp>
@@ -9333,6 +9525,7 @@
           <a:lstStyle/>
           <a:p>
             <a:pPr algn="ctr"/>
+            <a:endParaRPr/>
           </a:p>
         </p:txBody>
       </p:sp>
@@ -9447,7 +9640,7 @@
 </file>
 
 <file path=ppt/slides/slide7.xml><?xml version="1.0" encoding="utf-8"?>
-<p:sld xmlns:a="http://schemas.openxmlformats.org/drawingml/2006/main" xmlns:p="http://schemas.openxmlformats.org/presentationml/2006/main" xmlns:r="http://schemas.openxmlformats.org/officeDocument/2006/relationships">
+<p:sld xmlns:a="http://schemas.openxmlformats.org/drawingml/2006/main" xmlns:r="http://schemas.openxmlformats.org/officeDocument/2006/relationships" xmlns:p="http://schemas.openxmlformats.org/presentationml/2006/main">
   <p:cSld>
     <p:bg>
       <p:bgPr>
@@ -9463,7 +9656,14 @@
         <p:cNvGrpSpPr/>
         <p:nvPr/>
       </p:nvGrpSpPr>
-      <p:grpSpPr/>
+      <p:grpSpPr>
+        <a:xfrm>
+          <a:off x="0" y="0"/>
+          <a:ext cx="0" cy="0"/>
+          <a:chOff x="0" y="0"/>
+          <a:chExt cx="0" cy="0"/>
+        </a:xfrm>
+      </p:grpSpPr>
       <p:sp>
         <p:nvSpPr>
           <p:cNvPr id="2" name="Oval 1"/>
@@ -9504,6 +9704,7 @@
           <a:lstStyle/>
           <a:p>
             <a:pPr algn="ctr"/>
+            <a:endParaRPr/>
           </a:p>
         </p:txBody>
       </p:sp>
@@ -9547,6 +9748,7 @@
           <a:lstStyle/>
           <a:p>
             <a:pPr algn="ctr"/>
+            <a:endParaRPr/>
           </a:p>
         </p:txBody>
       </p:sp>
@@ -9590,6 +9792,7 @@
           <a:lstStyle/>
           <a:p>
             <a:pPr algn="ctr"/>
+            <a:endParaRPr/>
           </a:p>
         </p:txBody>
       </p:sp>
@@ -9770,6 +9973,7 @@
           <a:lstStyle/>
           <a:p>
             <a:pPr algn="ctr"/>
+            <a:endParaRPr/>
           </a:p>
         </p:txBody>
       </p:sp>
@@ -9882,6 +10086,7 @@
           <a:lstStyle/>
           <a:p>
             <a:pPr algn="ctr"/>
+            <a:endParaRPr/>
           </a:p>
         </p:txBody>
       </p:sp>
@@ -9994,6 +10199,7 @@
           <a:lstStyle/>
           <a:p>
             <a:pPr algn="ctr"/>
+            <a:endParaRPr/>
           </a:p>
         </p:txBody>
       </p:sp>
@@ -10106,6 +10312,7 @@
           <a:lstStyle/>
           <a:p>
             <a:pPr algn="ctr"/>
+            <a:endParaRPr/>
           </a:p>
         </p:txBody>
       </p:sp>

--- a/doc/Snowball_제안서_작가팀.pptx
+++ b/doc/Snowball_제안서_작가팀.pptx
@@ -308,7 +308,7 @@
           <a:p>
             <a:fld id="{5BCAD085-E8A6-8845-BD4E-CB4CCA059FC4}" type="datetimeFigureOut">
               <a:rPr lang="en-US" smtClean="0"/>
-              <a:t>3/30/2026</a:t>
+              <a:t>4/6/2026</a:t>
             </a:fld>
             <a:endParaRPr lang="en-US"/>
           </a:p>
@@ -476,7 +476,7 @@
           <a:p>
             <a:fld id="{5BCAD085-E8A6-8845-BD4E-CB4CCA059FC4}" type="datetimeFigureOut">
               <a:rPr lang="en-US" smtClean="0"/>
-              <a:t>3/30/2026</a:t>
+              <a:t>4/6/2026</a:t>
             </a:fld>
             <a:endParaRPr lang="en-US"/>
           </a:p>
@@ -654,7 +654,7 @@
           <a:p>
             <a:fld id="{5BCAD085-E8A6-8845-BD4E-CB4CCA059FC4}" type="datetimeFigureOut">
               <a:rPr lang="en-US" smtClean="0"/>
-              <a:t>3/30/2026</a:t>
+              <a:t>4/6/2026</a:t>
             </a:fld>
             <a:endParaRPr lang="en-US"/>
           </a:p>
@@ -822,7 +822,7 @@
           <a:p>
             <a:fld id="{5BCAD085-E8A6-8845-BD4E-CB4CCA059FC4}" type="datetimeFigureOut">
               <a:rPr lang="en-US" smtClean="0"/>
-              <a:t>3/30/2026</a:t>
+              <a:t>4/6/2026</a:t>
             </a:fld>
             <a:endParaRPr lang="en-US"/>
           </a:p>
@@ -1067,7 +1067,7 @@
           <a:p>
             <a:fld id="{5BCAD085-E8A6-8845-BD4E-CB4CCA059FC4}" type="datetimeFigureOut">
               <a:rPr lang="en-US" smtClean="0"/>
-              <a:t>3/30/2026</a:t>
+              <a:t>4/6/2026</a:t>
             </a:fld>
             <a:endParaRPr lang="en-US"/>
           </a:p>
@@ -1352,7 +1352,7 @@
           <a:p>
             <a:fld id="{5BCAD085-E8A6-8845-BD4E-CB4CCA059FC4}" type="datetimeFigureOut">
               <a:rPr lang="en-US" smtClean="0"/>
-              <a:t>3/30/2026</a:t>
+              <a:t>4/6/2026</a:t>
             </a:fld>
             <a:endParaRPr lang="en-US"/>
           </a:p>
@@ -1771,7 +1771,7 @@
           <a:p>
             <a:fld id="{5BCAD085-E8A6-8845-BD4E-CB4CCA059FC4}" type="datetimeFigureOut">
               <a:rPr lang="en-US" smtClean="0"/>
-              <a:t>3/30/2026</a:t>
+              <a:t>4/6/2026</a:t>
             </a:fld>
             <a:endParaRPr lang="en-US"/>
           </a:p>
@@ -1888,7 +1888,7 @@
           <a:p>
             <a:fld id="{5BCAD085-E8A6-8845-BD4E-CB4CCA059FC4}" type="datetimeFigureOut">
               <a:rPr lang="en-US" smtClean="0"/>
-              <a:t>3/30/2026</a:t>
+              <a:t>4/6/2026</a:t>
             </a:fld>
             <a:endParaRPr lang="en-US"/>
           </a:p>
@@ -1983,7 +1983,7 @@
           <a:p>
             <a:fld id="{5BCAD085-E8A6-8845-BD4E-CB4CCA059FC4}" type="datetimeFigureOut">
               <a:rPr lang="en-US" smtClean="0"/>
-              <a:t>3/30/2026</a:t>
+              <a:t>4/6/2026</a:t>
             </a:fld>
             <a:endParaRPr lang="en-US"/>
           </a:p>
@@ -2258,7 +2258,7 @@
           <a:p>
             <a:fld id="{5BCAD085-E8A6-8845-BD4E-CB4CCA059FC4}" type="datetimeFigureOut">
               <a:rPr lang="en-US" smtClean="0"/>
-              <a:t>3/30/2026</a:t>
+              <a:t>4/6/2026</a:t>
             </a:fld>
             <a:endParaRPr lang="en-US"/>
           </a:p>
@@ -2510,7 +2510,7 @@
           <a:p>
             <a:fld id="{5BCAD085-E8A6-8845-BD4E-CB4CCA059FC4}" type="datetimeFigureOut">
               <a:rPr lang="en-US" smtClean="0"/>
-              <a:t>3/30/2026</a:t>
+              <a:t>4/6/2026</a:t>
             </a:fld>
             <a:endParaRPr lang="en-US"/>
           </a:p>
@@ -2721,7 +2721,7 @@
           <a:p>
             <a:fld id="{5BCAD085-E8A6-8845-BD4E-CB4CCA059FC4}" type="datetimeFigureOut">
               <a:rPr lang="en-US" smtClean="0"/>
-              <a:t>3/30/2026</a:t>
+              <a:t>4/6/2026</a:t>
             </a:fld>
             <a:endParaRPr lang="en-US"/>
           </a:p>
@@ -3743,6 +3743,53 @@
           </a:p>
         </p:txBody>
       </p:sp>
+      <p:pic>
+        <p:nvPicPr>
+          <p:cNvPr id="19" name="Picture 2">
+            <a:extLst>
+              <a:ext uri="{FF2B5EF4-FFF2-40B4-BE49-F238E27FC236}">
+                <a16:creationId xmlns:a16="http://schemas.microsoft.com/office/drawing/2014/main" id="{AA406CCB-E0FA-F058-3569-43FC873827A1}"/>
+              </a:ext>
+            </a:extLst>
+          </p:cNvPr>
+          <p:cNvPicPr>
+            <a:picLocks noChangeAspect="1" noChangeArrowheads="1"/>
+          </p:cNvPicPr>
+          <p:nvPr/>
+        </p:nvPicPr>
+        <p:blipFill>
+          <a:blip r:embed="rId2">
+            <a:extLst>
+              <a:ext uri="{28A0092B-C50C-407E-A947-70E740481C1C}">
+                <a14:useLocalDpi xmlns:a14="http://schemas.microsoft.com/office/drawing/2010/main" val="0"/>
+              </a:ext>
+            </a:extLst>
+          </a:blip>
+          <a:srcRect/>
+          <a:stretch>
+            <a:fillRect/>
+          </a:stretch>
+        </p:blipFill>
+        <p:spPr bwMode="auto">
+          <a:xfrm>
+            <a:off x="11200290" y="89221"/>
+            <a:ext cx="916619" cy="916619"/>
+          </a:xfrm>
+          <a:prstGeom prst="rect">
+            <a:avLst/>
+          </a:prstGeom>
+          <a:noFill/>
+          <a:extLst>
+            <a:ext uri="{909E8E84-426E-40DD-AFC4-6F175D3DCCD1}">
+              <a14:hiddenFill xmlns:a14="http://schemas.microsoft.com/office/drawing/2010/main">
+                <a:solidFill>
+                  <a:srgbClr val="FFFFFF"/>
+                </a:solidFill>
+              </a14:hiddenFill>
+            </a:ext>
+          </a:extLst>
+        </p:spPr>
+      </p:pic>
     </p:spTree>
   </p:cSld>
   <p:clrMapOvr>
@@ -4461,6 +4508,53 @@
           </a:p>
         </p:txBody>
       </p:sp>
+      <p:pic>
+        <p:nvPicPr>
+          <p:cNvPr id="1026" name="Picture 2">
+            <a:extLst>
+              <a:ext uri="{FF2B5EF4-FFF2-40B4-BE49-F238E27FC236}">
+                <a16:creationId xmlns:a16="http://schemas.microsoft.com/office/drawing/2014/main" id="{4E10C07E-EC74-4AC2-0AEC-CD113D15E96A}"/>
+              </a:ext>
+            </a:extLst>
+          </p:cNvPr>
+          <p:cNvPicPr>
+            <a:picLocks noChangeAspect="1" noChangeArrowheads="1"/>
+          </p:cNvPicPr>
+          <p:nvPr/>
+        </p:nvPicPr>
+        <p:blipFill>
+          <a:blip r:embed="rId2">
+            <a:extLst>
+              <a:ext uri="{28A0092B-C50C-407E-A947-70E740481C1C}">
+                <a14:useLocalDpi xmlns:a14="http://schemas.microsoft.com/office/drawing/2010/main" val="0"/>
+              </a:ext>
+            </a:extLst>
+          </a:blip>
+          <a:srcRect/>
+          <a:stretch>
+            <a:fillRect/>
+          </a:stretch>
+        </p:blipFill>
+        <p:spPr bwMode="auto">
+          <a:xfrm>
+            <a:off x="11200290" y="89221"/>
+            <a:ext cx="916619" cy="916619"/>
+          </a:xfrm>
+          <a:prstGeom prst="rect">
+            <a:avLst/>
+          </a:prstGeom>
+          <a:noFill/>
+          <a:extLst>
+            <a:ext uri="{909E8E84-426E-40DD-AFC4-6F175D3DCCD1}">
+              <a14:hiddenFill xmlns:a14="http://schemas.microsoft.com/office/drawing/2010/main">
+                <a:solidFill>
+                  <a:srgbClr val="FFFFFF"/>
+                </a:solidFill>
+              </a14:hiddenFill>
+            </a:ext>
+          </a:extLst>
+        </p:spPr>
+      </p:pic>
     </p:spTree>
   </p:cSld>
   <p:clrMapOvr>
@@ -5824,6 +5918,53 @@
           </a:p>
         </p:txBody>
       </p:sp>
+      <p:pic>
+        <p:nvPicPr>
+          <p:cNvPr id="36" name="Picture 2">
+            <a:extLst>
+              <a:ext uri="{FF2B5EF4-FFF2-40B4-BE49-F238E27FC236}">
+                <a16:creationId xmlns:a16="http://schemas.microsoft.com/office/drawing/2014/main" id="{C2361397-B736-F59E-E67C-1A56AFE42DC6}"/>
+              </a:ext>
+            </a:extLst>
+          </p:cNvPr>
+          <p:cNvPicPr>
+            <a:picLocks noChangeAspect="1" noChangeArrowheads="1"/>
+          </p:cNvPicPr>
+          <p:nvPr/>
+        </p:nvPicPr>
+        <p:blipFill>
+          <a:blip r:embed="rId2">
+            <a:extLst>
+              <a:ext uri="{28A0092B-C50C-407E-A947-70E740481C1C}">
+                <a14:useLocalDpi xmlns:a14="http://schemas.microsoft.com/office/drawing/2010/main" val="0"/>
+              </a:ext>
+            </a:extLst>
+          </a:blip>
+          <a:srcRect/>
+          <a:stretch>
+            <a:fillRect/>
+          </a:stretch>
+        </p:blipFill>
+        <p:spPr bwMode="auto">
+          <a:xfrm>
+            <a:off x="11200290" y="89221"/>
+            <a:ext cx="916619" cy="916619"/>
+          </a:xfrm>
+          <a:prstGeom prst="rect">
+            <a:avLst/>
+          </a:prstGeom>
+          <a:noFill/>
+          <a:extLst>
+            <a:ext uri="{909E8E84-426E-40DD-AFC4-6F175D3DCCD1}">
+              <a14:hiddenFill xmlns:a14="http://schemas.microsoft.com/office/drawing/2010/main">
+                <a:solidFill>
+                  <a:srgbClr val="FFFFFF"/>
+                </a:solidFill>
+              </a14:hiddenFill>
+            </a:ext>
+          </a:extLst>
+        </p:spPr>
+      </p:pic>
     </p:spTree>
   </p:cSld>
   <p:clrMapOvr>
@@ -7924,6 +8065,53 @@
           </a:p>
         </p:txBody>
       </p:sp>
+      <p:pic>
+        <p:nvPicPr>
+          <p:cNvPr id="53" name="Picture 2">
+            <a:extLst>
+              <a:ext uri="{FF2B5EF4-FFF2-40B4-BE49-F238E27FC236}">
+                <a16:creationId xmlns:a16="http://schemas.microsoft.com/office/drawing/2014/main" id="{C4C4F318-B830-0376-A2A1-D3603336EF5C}"/>
+              </a:ext>
+            </a:extLst>
+          </p:cNvPr>
+          <p:cNvPicPr>
+            <a:picLocks noChangeAspect="1" noChangeArrowheads="1"/>
+          </p:cNvPicPr>
+          <p:nvPr/>
+        </p:nvPicPr>
+        <p:blipFill>
+          <a:blip r:embed="rId2">
+            <a:extLst>
+              <a:ext uri="{28A0092B-C50C-407E-A947-70E740481C1C}">
+                <a14:useLocalDpi xmlns:a14="http://schemas.microsoft.com/office/drawing/2010/main" val="0"/>
+              </a:ext>
+            </a:extLst>
+          </a:blip>
+          <a:srcRect/>
+          <a:stretch>
+            <a:fillRect/>
+          </a:stretch>
+        </p:blipFill>
+        <p:spPr bwMode="auto">
+          <a:xfrm>
+            <a:off x="11200290" y="89221"/>
+            <a:ext cx="916619" cy="916619"/>
+          </a:xfrm>
+          <a:prstGeom prst="rect">
+            <a:avLst/>
+          </a:prstGeom>
+          <a:noFill/>
+          <a:extLst>
+            <a:ext uri="{909E8E84-426E-40DD-AFC4-6F175D3DCCD1}">
+              <a14:hiddenFill xmlns:a14="http://schemas.microsoft.com/office/drawing/2010/main">
+                <a:solidFill>
+                  <a:srgbClr val="FFFFFF"/>
+                </a:solidFill>
+              </a14:hiddenFill>
+            </a:ext>
+          </a:extLst>
+        </p:spPr>
+      </p:pic>
     </p:spTree>
   </p:cSld>
   <p:clrMapOvr>
@@ -8613,6 +8801,53 @@
           </a:p>
         </p:txBody>
       </p:sp>
+      <p:pic>
+        <p:nvPicPr>
+          <p:cNvPr id="21" name="Picture 2">
+            <a:extLst>
+              <a:ext uri="{FF2B5EF4-FFF2-40B4-BE49-F238E27FC236}">
+                <a16:creationId xmlns:a16="http://schemas.microsoft.com/office/drawing/2014/main" id="{D7715307-228F-4BF1-729E-F640E167ACFC}"/>
+              </a:ext>
+            </a:extLst>
+          </p:cNvPr>
+          <p:cNvPicPr>
+            <a:picLocks noChangeAspect="1" noChangeArrowheads="1"/>
+          </p:cNvPicPr>
+          <p:nvPr/>
+        </p:nvPicPr>
+        <p:blipFill>
+          <a:blip r:embed="rId6">
+            <a:extLst>
+              <a:ext uri="{28A0092B-C50C-407E-A947-70E740481C1C}">
+                <a14:useLocalDpi xmlns:a14="http://schemas.microsoft.com/office/drawing/2010/main" val="0"/>
+              </a:ext>
+            </a:extLst>
+          </a:blip>
+          <a:srcRect/>
+          <a:stretch>
+            <a:fillRect/>
+          </a:stretch>
+        </p:blipFill>
+        <p:spPr bwMode="auto">
+          <a:xfrm>
+            <a:off x="11200290" y="89221"/>
+            <a:ext cx="916619" cy="916619"/>
+          </a:xfrm>
+          <a:prstGeom prst="rect">
+            <a:avLst/>
+          </a:prstGeom>
+          <a:noFill/>
+          <a:extLst>
+            <a:ext uri="{909E8E84-426E-40DD-AFC4-6F175D3DCCD1}">
+              <a14:hiddenFill xmlns:a14="http://schemas.microsoft.com/office/drawing/2010/main">
+                <a:solidFill>
+                  <a:srgbClr val="FFFFFF"/>
+                </a:solidFill>
+              </a14:hiddenFill>
+            </a:ext>
+          </a:extLst>
+        </p:spPr>
+      </p:pic>
     </p:spTree>
   </p:cSld>
   <p:clrMapOvr>
@@ -9631,6 +9866,53 @@
           </a:p>
         </p:txBody>
       </p:sp>
+      <p:pic>
+        <p:nvPicPr>
+          <p:cNvPr id="28" name="Picture 2">
+            <a:extLst>
+              <a:ext uri="{FF2B5EF4-FFF2-40B4-BE49-F238E27FC236}">
+                <a16:creationId xmlns:a16="http://schemas.microsoft.com/office/drawing/2014/main" id="{DE51DA30-2580-BB22-3B6D-FD4C1865E961}"/>
+              </a:ext>
+            </a:extLst>
+          </p:cNvPr>
+          <p:cNvPicPr>
+            <a:picLocks noChangeAspect="1" noChangeArrowheads="1"/>
+          </p:cNvPicPr>
+          <p:nvPr/>
+        </p:nvPicPr>
+        <p:blipFill>
+          <a:blip r:embed="rId2">
+            <a:extLst>
+              <a:ext uri="{28A0092B-C50C-407E-A947-70E740481C1C}">
+                <a14:useLocalDpi xmlns:a14="http://schemas.microsoft.com/office/drawing/2010/main" val="0"/>
+              </a:ext>
+            </a:extLst>
+          </a:blip>
+          <a:srcRect/>
+          <a:stretch>
+            <a:fillRect/>
+          </a:stretch>
+        </p:blipFill>
+        <p:spPr bwMode="auto">
+          <a:xfrm>
+            <a:off x="11200290" y="89221"/>
+            <a:ext cx="916619" cy="916619"/>
+          </a:xfrm>
+          <a:prstGeom prst="rect">
+            <a:avLst/>
+          </a:prstGeom>
+          <a:noFill/>
+          <a:extLst>
+            <a:ext uri="{909E8E84-426E-40DD-AFC4-6F175D3DCCD1}">
+              <a14:hiddenFill xmlns:a14="http://schemas.microsoft.com/office/drawing/2010/main">
+                <a:solidFill>
+                  <a:srgbClr val="FFFFFF"/>
+                </a:solidFill>
+              </a14:hiddenFill>
+            </a:ext>
+          </a:extLst>
+        </p:spPr>
+      </p:pic>
     </p:spTree>
   </p:cSld>
   <p:clrMapOvr>
@@ -10588,6 +10870,53 @@
           </a:p>
         </p:txBody>
       </p:sp>
+      <p:pic>
+        <p:nvPicPr>
+          <p:cNvPr id="27" name="Picture 2">
+            <a:extLst>
+              <a:ext uri="{FF2B5EF4-FFF2-40B4-BE49-F238E27FC236}">
+                <a16:creationId xmlns:a16="http://schemas.microsoft.com/office/drawing/2014/main" id="{F0DE8A86-7D9E-EC71-6957-CAAD3217F282}"/>
+              </a:ext>
+            </a:extLst>
+          </p:cNvPr>
+          <p:cNvPicPr>
+            <a:picLocks noChangeAspect="1" noChangeArrowheads="1"/>
+          </p:cNvPicPr>
+          <p:nvPr/>
+        </p:nvPicPr>
+        <p:blipFill>
+          <a:blip r:embed="rId2">
+            <a:extLst>
+              <a:ext uri="{28A0092B-C50C-407E-A947-70E740481C1C}">
+                <a14:useLocalDpi xmlns:a14="http://schemas.microsoft.com/office/drawing/2010/main" val="0"/>
+              </a:ext>
+            </a:extLst>
+          </a:blip>
+          <a:srcRect/>
+          <a:stretch>
+            <a:fillRect/>
+          </a:stretch>
+        </p:blipFill>
+        <p:spPr bwMode="auto">
+          <a:xfrm>
+            <a:off x="11200290" y="89221"/>
+            <a:ext cx="916619" cy="916619"/>
+          </a:xfrm>
+          <a:prstGeom prst="rect">
+            <a:avLst/>
+          </a:prstGeom>
+          <a:noFill/>
+          <a:extLst>
+            <a:ext uri="{909E8E84-426E-40DD-AFC4-6F175D3DCCD1}">
+              <a14:hiddenFill xmlns:a14="http://schemas.microsoft.com/office/drawing/2010/main">
+                <a:solidFill>
+                  <a:srgbClr val="FFFFFF"/>
+                </a:solidFill>
+              </a14:hiddenFill>
+            </a:ext>
+          </a:extLst>
+        </p:spPr>
+      </p:pic>
     </p:spTree>
   </p:cSld>
   <p:clrMapOvr>
